--- a/21_September_Monday/02_Seeking_for_AI/02_Seeking_for_AI.pptx
+++ b/21_September_Monday/02_Seeking_for_AI/02_Seeking_for_AI.pptx
@@ -14,6 +14,7 @@
     <p:sldId id="262" r:id="rId8"/>
     <p:sldId id="263" r:id="rId9"/>
     <p:sldId id="264" r:id="rId10"/>
+    <p:sldId id="265" r:id="rId11"/>
   </p:sldIdLst>
   <p:sldSz cx="9144000" cy="5143500" type="screen16x9"/>
   <p:notesSz cx="6858000" cy="9144000"/>
@@ -3105,13 +3106,13 @@
             <a:spLocks noGrp="1"/>
           </p:cNvSpPr>
           <p:nvPr>
-            <p:ph type="title"/>
+            <p:ph type="ctrTitle"/>
           </p:nvPr>
         </p:nvSpPr>
         <p:spPr>
           <a:xfrm>
-            <a:off x="722313" y="3305176"/>
-            <a:ext cx="7772400" cy="1021556"/>
+            <a:off x="685800" y="1597819"/>
+            <a:ext cx="7772400" cy="1102519"/>
           </a:xfrm>
         </p:spPr>
         <p:txBody>
@@ -3123,7 +3124,133 @@
             </a:pPr>
             <a:r>
               <a:rPr/>
-              <a:t>Seeking for AI: Realistic Datasets for Photons and Neutrons</a:t>
+              <a:t>Seeking for AI</a:t>
+            </a:r>
+          </a:p>
+        </p:txBody>
+      </p:sp>
+      <p:sp>
+        <p:nvSpPr>
+          <p:cNvPr id="3" name="Subtitle 2"/>
+          <p:cNvSpPr>
+            <a:spLocks noGrp="1"/>
+          </p:cNvSpPr>
+          <p:nvPr>
+            <p:ph idx="1" type="subTitle"/>
+          </p:nvPr>
+        </p:nvSpPr>
+        <p:spPr>
+          <a:xfrm>
+            <a:off x="1371600" y="2914650"/>
+            <a:ext cx="6400800" cy="1314450"/>
+          </a:xfrm>
+        </p:spPr>
+        <p:txBody>
+          <a:bodyPr/>
+          <a:lstStyle/>
+          <a:p>
+            <a:pPr lvl="0" indent="0" marL="0">
+              <a:buNone/>
+            </a:pPr>
+            <a:br/>
+            <a:br/>
+            <a:r>
+              <a:rPr/>
+              <a:t>Emmanuel Farhi</a:t>
+            </a:r>
+          </a:p>
+        </p:txBody>
+      </p:sp>
+    </p:spTree>
+  </p:cSld>
+</p:sld>
+</file>
+
+<file path=ppt/slides/slide10.xml><?xml version="1.0" encoding="utf-8"?>
+<p:sld xmlns:a="http://schemas.openxmlformats.org/drawingml/2006/main" xmlns:r="http://schemas.openxmlformats.org/officeDocument/2006/relationships" xmlns:p="http://schemas.openxmlformats.org/presentationml/2006/main">
+  <p:cSld>
+    <p:spTree>
+      <p:nvGrpSpPr>
+        <p:cNvPr id="1" name=""/>
+        <p:cNvGrpSpPr/>
+        <p:nvPr/>
+      </p:nvGrpSpPr>
+      <p:grpSpPr>
+        <a:xfrm>
+          <a:off x="0" y="0"/>
+          <a:ext cx="0" cy="0"/>
+          <a:chOff x="0" y="0"/>
+          <a:chExt cx="0" cy="0"/>
+        </a:xfrm>
+      </p:grpSpPr>
+      <p:sp>
+        <p:nvSpPr>
+          <p:cNvPr id="2" name="Title 1"/>
+          <p:cNvSpPr>
+            <a:spLocks noGrp="1"/>
+          </p:cNvSpPr>
+          <p:nvPr>
+            <p:ph type="title"/>
+          </p:nvPr>
+        </p:nvSpPr>
+        <p:spPr/>
+        <p:txBody>
+          <a:bodyPr/>
+          <a:lstStyle/>
+          <a:p>
+            <a:pPr lvl="0" indent="0" marL="0">
+              <a:buNone/>
+            </a:pPr>
+            <a:r>
+              <a:rPr/>
+              <a:t>Thank You!</a:t>
+            </a:r>
+          </a:p>
+        </p:txBody>
+      </p:sp>
+      <p:sp>
+        <p:nvSpPr>
+          <p:cNvPr id="3" name="Content Placeholder 2"/>
+          <p:cNvSpPr>
+            <a:spLocks noGrp="1"/>
+          </p:cNvSpPr>
+          <p:nvPr>
+            <p:ph idx="1"/>
+          </p:nvPr>
+        </p:nvSpPr>
+        <p:spPr/>
+        <p:txBody>
+          <a:bodyPr/>
+          <a:lstStyle/>
+          <a:p>
+            <a:pPr lvl="0" indent="0" marL="0">
+              <a:buNone/>
+            </a:pPr>
+            <a:r>
+              <a:rPr i="1"/>
+              <a:t>Questions?</a:t>
+            </a:r>
+          </a:p>
+          <a:p>
+            <a:pPr lvl="0" indent="0" marL="0">
+              <a:buNone/>
+            </a:pPr>
+            <a:r>
+              <a:rPr b="1"/>
+              <a:t>Contact</a:t>
+            </a:r>
+            <a:r>
+              <a:rPr/>
+              <a:t>: Emmanuel Farhi · [Your Affiliation/Email]</a:t>
+            </a:r>
+          </a:p>
+          <a:p>
+            <a:pPr lvl="0" indent="0" marL="0">
+              <a:buNone/>
+            </a:pPr>
+            <a:r>
+              <a:rPr i="1"/>
+              <a:t>Supported by PEPR DIADEM and Partner Organizations</a:t>
             </a:r>
           </a:p>
         </p:txBody>
@@ -3152,15 +3279,20 @@
       </p:grpSpPr>
       <p:sp>
         <p:nvSpPr>
-          <p:cNvPr id="3" name="Content Placeholder 2"/>
-          <p:cNvSpPr>
-            <a:spLocks noGrp="1"/>
-          </p:cNvSpPr>
-          <p:nvPr>
-            <p:ph idx="1"/>
-          </p:nvPr>
-        </p:nvSpPr>
-        <p:spPr/>
+          <p:cNvPr id="2" name="Title 1"/>
+          <p:cNvSpPr>
+            <a:spLocks noGrp="1"/>
+          </p:cNvSpPr>
+          <p:nvPr>
+            <p:ph type="title"/>
+          </p:nvPr>
+        </p:nvSpPr>
+        <p:spPr>
+          <a:xfrm>
+            <a:off x="722313" y="3305176"/>
+            <a:ext cx="7772400" cy="1021556"/>
+          </a:xfrm>
+        </p:spPr>
         <p:txBody>
           <a:bodyPr/>
           <a:lstStyle/>
@@ -3169,21 +3301,8 @@
               <a:buNone/>
             </a:pPr>
             <a:r>
-              <a:rPr i="1"/>
-              <a:t>PaNRAID School · Supported by PEPR DIADEM</a:t>
-            </a:r>
-          </a:p>
-          <a:p>
-            <a:pPr lvl="0" indent="0" marL="0">
-              <a:buNone/>
-            </a:pPr>
-            <a:r>
-              <a:rPr b="1"/>
-              <a:t>Objective</a:t>
-            </a:r>
-            <a:r>
-              <a:rPr/>
-              <a:t>: Explore how AI can leverage simulated photon and neutron datasets to solve inverse problems, optimize experiments, and train surrogate models.</a:t>
+              <a:rPr/>
+              <a:t>Seeking for AI: Realistic Datasets for Photons and Neutrons</a:t>
             </a:r>
           </a:p>
         </p:txBody>
@@ -3212,12 +3331,12 @@
       </p:grpSpPr>
       <p:sp>
         <p:nvSpPr>
-          <p:cNvPr id="2" name="Title 1"/>
-          <p:cNvSpPr>
-            <a:spLocks noGrp="1"/>
-          </p:cNvSpPr>
-          <p:nvPr>
-            <p:ph type="title"/>
+          <p:cNvPr id="3" name="Content Placeholder 2"/>
+          <p:cNvSpPr>
+            <a:spLocks noGrp="1"/>
+          </p:cNvSpPr>
+          <p:nvPr>
+            <p:ph idx="1"/>
           </p:nvPr>
         </p:nvSpPr>
         <p:spPr/>
@@ -3229,186 +3348,21 @@
               <a:buNone/>
             </a:pPr>
             <a:r>
-              <a:rPr/>
-              <a:t>Why “Photons and Neutrons”?</a:t>
-            </a:r>
-          </a:p>
-        </p:txBody>
-      </p:sp>
-      <p:sp>
-        <p:nvSpPr>
-          <p:cNvPr id="3" name="Content Placeholder 2"/>
-          <p:cNvSpPr>
-            <a:spLocks noGrp="1"/>
-          </p:cNvSpPr>
-          <p:nvPr>
-            <p:ph idx="1"/>
-          </p:nvPr>
-        </p:nvSpPr>
-        <p:spPr/>
-        <p:txBody>
-          <a:bodyPr/>
-          <a:lstStyle/>
+              <a:rPr i="1"/>
+              <a:t>PaNRAID School · Supported by PEPR DIADEM</a:t>
+            </a:r>
+          </a:p>
           <a:p>
             <a:pPr lvl="0" indent="0" marL="0">
-              <a:spcBef>
-                <a:spcPts val="3000"/>
-              </a:spcBef>
               <a:buNone/>
             </a:pPr>
             <a:r>
               <a:rPr b="1"/>
-              <a:t>Shared Physics and Simulation Capabilities</a:t>
-            </a:r>
-          </a:p>
-          <a:p>
-            <a:pPr lvl="0"/>
-            <a:r>
-              <a:rPr b="1"/>
-              <a:t>Similar Interaction Processes</a:t>
-            </a:r>
-            <a:r>
-              <a:rPr/>
-              <a:t>:</a:t>
-            </a:r>
-          </a:p>
-          <a:p>
-            <a:pPr lvl="1"/>
-            <a:r>
-              <a:rPr b="1"/>
-              <a:t>Absorption</a:t>
-            </a:r>
-            <a:r>
-              <a:rPr/>
-              <a:t>: Energy transfer to the material (e.g., photoelectric effect for X-rays, neutron capture).</a:t>
-            </a:r>
-          </a:p>
-          <a:p>
-            <a:pPr lvl="1"/>
-            <a:r>
-              <a:rPr b="1"/>
-              <a:t>Scattering</a:t>
-            </a:r>
-            <a:r>
-              <a:rPr/>
-              <a:t>:</a:t>
-            </a:r>
-          </a:p>
-          <a:p>
-            <a:pPr lvl="2"/>
-            <a:r>
-              <a:rPr i="1"/>
-              <a:t>Elastic</a:t>
-            </a:r>
-            <a:r>
-              <a:rPr/>
-              <a:t>: Structure analysis (e.g., Bragg diffraction for X-rays, neutron diffraction).</a:t>
-            </a:r>
-          </a:p>
-          <a:p>
-            <a:pPr lvl="2"/>
-            <a:r>
-              <a:rPr i="1"/>
-              <a:t>Inelastic</a:t>
-            </a:r>
-            <a:r>
-              <a:rPr/>
-              <a:t>: Dynamics analysis (e.g., Raman scattering for X-rays, neutron inelastic scattering).</a:t>
-            </a:r>
-          </a:p>
-          <a:p>
-            <a:pPr lvl="1"/>
-            <a:r>
-              <a:rPr b="1"/>
-              <a:t>Decay</a:t>
-            </a:r>
-            <a:r>
-              <a:rPr/>
-              <a:t>: Time-resolved studies (e.g., fluorescence, neutron activation).</a:t>
-            </a:r>
-          </a:p>
-          <a:p>
-            <a:pPr lvl="0"/>
-            <a:r>
-              <a:rPr b="1"/>
-              <a:t>Simulation Tools</a:t>
-            </a:r>
-            <a:r>
-              <a:rPr/>
-              <a:t>:</a:t>
-            </a:r>
-          </a:p>
-          <a:p>
-            <a:pPr lvl="1"/>
-            <a:r>
-              <a:rPr b="1"/>
-              <a:t>McStas</a:t>
-            </a:r>
-            <a:r>
-              <a:rPr/>
-              <a:t>: Monte Carlo simulator for neutron scattering instruments.</a:t>
-            </a:r>
-          </a:p>
-          <a:p>
-            <a:pPr lvl="1"/>
-            <a:r>
-              <a:rPr b="1"/>
-              <a:t>McXtrace</a:t>
-            </a:r>
-            <a:r>
-              <a:rPr/>
-              <a:t>: Monte Carlo simulator for X-ray instruments.</a:t>
-            </a:r>
-          </a:p>
-          <a:p>
-            <a:pPr lvl="1"/>
-            <a:r>
-              <a:rPr/>
-              <a:t>Both enable realistic modeling of beamlines, detectors, and sample interactions.</a:t>
-            </a:r>
-          </a:p>
-          <a:p>
-            <a:pPr lvl="0"/>
-            <a:r>
-              <a:rPr b="1"/>
-              <a:t>Why Simulations Matter</a:t>
-            </a:r>
-            <a:r>
-              <a:rPr/>
-              <a:t>:</a:t>
-            </a:r>
-          </a:p>
-          <a:p>
-            <a:pPr lvl="1"/>
-            <a:r>
-              <a:rPr b="1"/>
-              <a:t>Realism</a:t>
-            </a:r>
-            <a:r>
-              <a:rPr/>
-              <a:t>: Capture complex instrument geometries and material responses.</a:t>
-            </a:r>
-          </a:p>
-          <a:p>
-            <a:pPr lvl="1"/>
-            <a:r>
-              <a:rPr b="1"/>
-              <a:t>Flexibility</a:t>
-            </a:r>
-            <a:r>
-              <a:rPr/>
-              <a:t>: Test hypothetical setups or extreme conditions (e.g., high pressures, temperatures).</a:t>
-            </a:r>
-          </a:p>
-          <a:p>
-            <a:pPr lvl="1"/>
-            <a:r>
-              <a:rPr b="1"/>
-              <a:t>Cost-Effective</a:t>
-            </a:r>
-            <a:r>
-              <a:rPr/>
-              <a:t>: Avoid expensive trial-and-error on real instruments.</a:t>
+              <a:t>Objective</a:t>
+            </a:r>
+            <a:r>
+              <a:rPr/>
+              <a:t>: Explore how AI can leverage simulated photon and neutron datasets to solve inverse problems, optimize experiments, and train surrogate models.</a:t>
             </a:r>
           </a:p>
         </p:txBody>
@@ -3455,7 +3409,7 @@
             </a:pPr>
             <a:r>
               <a:rPr/>
-              <a:t>Why Realistic AI Datasets?</a:t>
+              <a:t>Why “Photons and Neutrons”?</a:t>
             </a:r>
           </a:p>
         </p:txBody>
@@ -3483,14 +3437,14 @@
             </a:pPr>
             <a:r>
               <a:rPr b="1"/>
-              <a:t>The Problem with Experimental Data</a:t>
-            </a:r>
-          </a:p>
-          <a:p>
-            <a:pPr lvl="0"/>
-            <a:r>
-              <a:rPr b="1"/>
-              <a:t>Lack of Annotations</a:t>
+              <a:t>Shared Physics and Simulation Capabilities</a:t>
+            </a:r>
+          </a:p>
+          <a:p>
+            <a:pPr lvl="0"/>
+            <a:r>
+              <a:rPr b="1"/>
+              <a:t>Similar Interaction Processes</a:t>
             </a:r>
             <a:r>
               <a:rPr/>
@@ -3500,22 +3454,19 @@
           <a:p>
             <a:pPr lvl="1"/>
             <a:r>
-              <a:rPr/>
-              <a:t>Raw data often lacks metadata (e.g., sample composition, instrument settings).</a:t>
+              <a:rPr b="1"/>
+              <a:t>Absorption</a:t>
+            </a:r>
+            <a:r>
+              <a:rPr/>
+              <a:t>: Energy transfer to the material (e.g., photoelectric effect for X-rays, neutron capture).</a:t>
             </a:r>
           </a:p>
           <a:p>
             <a:pPr lvl="1"/>
             <a:r>
-              <a:rPr/>
-              <a:t>Manual annotation is time-consuming and error-prone.</a:t>
-            </a:r>
-          </a:p>
-          <a:p>
-            <a:pPr lvl="0"/>
-            <a:r>
-              <a:rPr b="1"/>
-              <a:t>Publications as Implicit Annotations</a:t>
+              <a:rPr b="1"/>
+              <a:t>Scattering</a:t>
             </a:r>
             <a:r>
               <a:rPr/>
@@ -3523,36 +3474,83 @@
             </a:r>
           </a:p>
           <a:p>
+            <a:pPr lvl="2"/>
+            <a:r>
+              <a:rPr i="1"/>
+              <a:t>Elastic</a:t>
+            </a:r>
+            <a:r>
+              <a:rPr/>
+              <a:t>: Structure analysis (e.g., Bragg diffraction for X-rays, neutron diffraction).</a:t>
+            </a:r>
+          </a:p>
+          <a:p>
+            <a:pPr lvl="2"/>
+            <a:r>
+              <a:rPr i="1"/>
+              <a:t>Inelastic</a:t>
+            </a:r>
+            <a:r>
+              <a:rPr/>
+              <a:t>: Dynamics analysis (e.g., Raman scattering for X-rays, neutron inelastic scattering).</a:t>
+            </a:r>
+          </a:p>
+          <a:p>
             <a:pPr lvl="1"/>
             <a:r>
-              <a:rPr/>
-              <a:t>Papers describe experimental conditions, but formats vary widely.</a:t>
+              <a:rPr b="1"/>
+              <a:t>Decay</a:t>
+            </a:r>
+            <a:r>
+              <a:rPr/>
+              <a:t>: Time-resolved studies (e.g., fluorescence, neutron activation).</a:t>
+            </a:r>
+          </a:p>
+          <a:p>
+            <a:pPr lvl="0"/>
+            <a:r>
+              <a:rPr b="1"/>
+              <a:t>Simulation Tools</a:t>
+            </a:r>
+            <a:r>
+              <a:rPr/>
+              <a:t>:</a:t>
             </a:r>
           </a:p>
           <a:p>
             <a:pPr lvl="1"/>
             <a:r>
-              <a:rPr/>
-              <a:t>Not machine-readable or standardized for AI training.</a:t>
-            </a:r>
-          </a:p>
-          <a:p>
-            <a:pPr lvl="0" indent="0" marL="0">
-              <a:spcBef>
-                <a:spcPts val="3000"/>
-              </a:spcBef>
-              <a:buNone/>
-            </a:pPr>
-            <a:r>
-              <a:rPr b="1"/>
-              <a:t>The Power of Simulated Data</a:t>
-            </a:r>
-          </a:p>
-          <a:p>
-            <a:pPr lvl="0"/>
-            <a:r>
-              <a:rPr b="1"/>
-              <a:t>Controlled Parameters</a:t>
+              <a:rPr b="1"/>
+              <a:t>McStas</a:t>
+            </a:r>
+            <a:r>
+              <a:rPr/>
+              <a:t>: Monte Carlo simulator for neutron scattering instruments.</a:t>
+            </a:r>
+          </a:p>
+          <a:p>
+            <a:pPr lvl="1"/>
+            <a:r>
+              <a:rPr b="1"/>
+              <a:t>McXtrace</a:t>
+            </a:r>
+            <a:r>
+              <a:rPr/>
+              <a:t>: Monte Carlo simulator for X-ray instruments.</a:t>
+            </a:r>
+          </a:p>
+          <a:p>
+            <a:pPr lvl="1"/>
+            <a:r>
+              <a:rPr/>
+              <a:t>Both enable realistic modeling of beamlines, detectors, and sample interactions.</a:t>
+            </a:r>
+          </a:p>
+          <a:p>
+            <a:pPr lvl="0"/>
+            <a:r>
+              <a:rPr b="1"/>
+              <a:t>Why Simulations Matter</a:t>
             </a:r>
             <a:r>
               <a:rPr/>
@@ -3562,148 +3560,34 @@
           <a:p>
             <a:pPr lvl="1"/>
             <a:r>
-              <a:rPr/>
-              <a:t>Every input (e.g., sample thickness, detector angle) is known and adjustable.</a:t>
+              <a:rPr b="1"/>
+              <a:t>Realism</a:t>
+            </a:r>
+            <a:r>
+              <a:rPr/>
+              <a:t>: Capture complex instrument geometries and material responses.</a:t>
             </a:r>
           </a:p>
           <a:p>
             <a:pPr lvl="1"/>
             <a:r>
-              <a:rPr/>
-              <a:t>Outputs (e.g., scattering patterns, spectra) are directly linked to inputs.</a:t>
-            </a:r>
-          </a:p>
-          <a:p>
-            <a:pPr lvl="0"/>
-            <a:r>
-              <a:rPr b="1"/>
-              <a:t>Pipeline Workflow</a:t>
-            </a:r>
-            <a:r>
-              <a:rPr/>
-              <a:t>:</a:t>
+              <a:rPr b="1"/>
+              <a:t>Flexibility</a:t>
+            </a:r>
+            <a:r>
+              <a:rPr/>
+              <a:t>: Test hypothetical setups or extreme conditions (e.g., high pressures, temperatures).</a:t>
             </a:r>
           </a:p>
           <a:p>
             <a:pPr lvl="1"/>
             <a:r>
-              <a:rPr/>
-              <a:t>Parameters → [Simulation (McStas/McXtrace)] → Virtual “Measurement”</a:t>
-            </a:r>
-          </a:p>
-          <a:p>
-            <a:pPr lvl="1" indent="0" marL="342900">
-              <a:buNone/>
-            </a:pPr>
-            <a:r>
-              <a:rPr/>
-              <a:t>Example: Simulate a neutron scattering experiment with varying sample temperatures.</a:t>
-            </a:r>
-          </a:p>
-          <a:p>
-            <a:pPr lvl="0"/>
-            <a:r>
-              <a:rPr b="1"/>
-              <a:t>Inverse Problem</a:t>
-            </a:r>
-            <a:r>
-              <a:rPr/>
-              <a:t>:</a:t>
-            </a:r>
-          </a:p>
-          <a:p>
-            <a:pPr lvl="0"/>
-            <a:r>
-              <a:rPr b="1"/>
-              <a:t>Goal</a:t>
-            </a:r>
-            <a:r>
-              <a:rPr/>
-              <a:t>: Reconstruct input parameters from measured data.</a:t>
-            </a:r>
-          </a:p>
-          <a:p>
-            <a:pPr lvl="0"/>
-            <a:r>
-              <a:rPr b="1"/>
-              <a:t>AI Approach</a:t>
-            </a:r>
-            <a:r>
-              <a:rPr/>
-              <a:t>:</a:t>
-            </a:r>
-          </a:p>
-          <a:p>
-            <a:pPr lvl="1" indent="0">
-              <a:buNone/>
-            </a:pPr>
-            <a:r>
-              <a:rPr>
-                <a:latin typeface="Courier"/>
-              </a:rPr>
-              <a:t>Measurement → [AI Algorithm (e.g., CNN, Bayesian Optimization)] → Parameters</a:t>
-            </a:r>
-          </a:p>
-          <a:p>
-            <a:pPr lvl="0"/>
-            <a:r>
-              <a:rPr/>
-              <a:t>Example: Predict sample composition from a scattering pattern.</a:t>
-            </a:r>
-          </a:p>
-          <a:p>
-            <a:pPr lvl="0"/>
-            <a:r>
-              <a:rPr b="1"/>
-              <a:t>Surrogate Models</a:t>
-            </a:r>
-            <a:r>
-              <a:rPr/>
-              <a:t>:</a:t>
-            </a:r>
-          </a:p>
-          <a:p>
-            <a:pPr lvl="0"/>
-            <a:r>
-              <a:rPr b="1"/>
-              <a:t>Purpose</a:t>
-            </a:r>
-            <a:r>
-              <a:rPr/>
-              <a:t>: Replace slow simulations with fast AI models.</a:t>
-            </a:r>
-          </a:p>
-          <a:p>
-            <a:pPr lvl="0"/>
-            <a:r>
-              <a:rPr b="1"/>
-              <a:t>Pipeline</a:t>
-            </a:r>
-            <a:r>
-              <a:rPr/>
-              <a:t>:</a:t>
-            </a:r>
-          </a:p>
-          <a:p>
-            <a:pPr lvl="1" indent="0">
-              <a:buNone/>
-            </a:pPr>
-            <a:r>
-              <a:rPr>
-                <a:latin typeface="Courier"/>
-              </a:rPr>
-              <a:t>Parameters → [AI Model (e.g., Neural Network)] → Virtual "Measurement" (1000x faster)</a:t>
-            </a:r>
-          </a:p>
-          <a:p>
-            <a:pPr lvl="0"/>
-            <a:r>
-              <a:rPr b="1"/>
-              <a:t>Use Case</a:t>
-            </a:r>
-            <a:r>
-              <a:rPr/>
-              <a:t>: Real-time optimization of beamline configurations.</a:t>
+              <a:rPr b="1"/>
+              <a:t>Cost-Effective</a:t>
+            </a:r>
+            <a:r>
+              <a:rPr/>
+              <a:t>: Avoid expensive trial-and-error on real instruments.</a:t>
             </a:r>
           </a:p>
         </p:txBody>
@@ -3750,7 +3634,7 @@
             </a:pPr>
             <a:r>
               <a:rPr/>
-              <a:t>General AI Methodology</a:t>
+              <a:t>Why Realistic AI Datasets?</a:t>
             </a:r>
           </a:p>
         </p:txBody>
@@ -3778,14 +3662,14 @@
             </a:pPr>
             <a:r>
               <a:rPr b="1"/>
-              <a:t>AI as a Universal Function Approximator</a:t>
-            </a:r>
-          </a:p>
-          <a:p>
-            <a:pPr lvl="0"/>
-            <a:r>
-              <a:rPr b="1"/>
-              <a:t>Black Box Concept</a:t>
+              <a:t>The Problem with Experimental Data</a:t>
+            </a:r>
+          </a:p>
+          <a:p>
+            <a:pPr lvl="0"/>
+            <a:r>
+              <a:rPr b="1"/>
+              <a:t>Lack of Annotations</a:t>
             </a:r>
             <a:r>
               <a:rPr/>
@@ -3793,28 +3677,24 @@
             </a:r>
           </a:p>
           <a:p>
-            <a:pPr lvl="0"/>
-            <a:r>
-              <a:rPr/>
-              <a:t>Input (e.g., scattering pattern) → [AI Model] → Output (e.g., sample density).</a:t>
-            </a:r>
-          </a:p>
-          <a:p>
-            <a:pPr lvl="0"/>
-            <a:r>
-              <a:rPr b="1"/>
-              <a:t>Universal Approximation Theorem</a:t>
-            </a:r>
-            <a:r>
-              <a:rPr/>
-              <a:t>: A neural network can approximate any continuous function given sufficient data and complexity.</a:t>
-            </a:r>
-          </a:p>
-          <a:p>
-            <a:pPr lvl="0"/>
-            <a:r>
-              <a:rPr b="1"/>
-              <a:t>General Behavior</a:t>
+            <a:pPr lvl="1"/>
+            <a:r>
+              <a:rPr/>
+              <a:t>Raw data often lacks metadata (e.g., sample composition, instrument settings).</a:t>
+            </a:r>
+          </a:p>
+          <a:p>
+            <a:pPr lvl="1"/>
+            <a:r>
+              <a:rPr/>
+              <a:t>Manual annotation is time-consuming and error-prone.</a:t>
+            </a:r>
+          </a:p>
+          <a:p>
+            <a:pPr lvl="0"/>
+            <a:r>
+              <a:rPr b="1"/>
+              <a:t>Publications as Implicit Annotations</a:t>
             </a:r>
             <a:r>
               <a:rPr/>
@@ -3822,25 +3702,17 @@
             </a:r>
           </a:p>
           <a:p>
-            <a:pPr lvl="0"/>
-            <a:r>
-              <a:rPr/>
-              <a:t>All AI methods (CNNs, RNNs, SVMs) follow the same principle: </a:t>
-            </a:r>
-            <a:r>
-              <a:rPr b="1"/>
-              <a:t>map inputs to outputs via learned weights</a:t>
-            </a:r>
-            <a:r>
-              <a:rPr/>
-              <a:t>.</a:t>
-            </a:r>
-          </a:p>
-          <a:p>
-            <a:pPr lvl="0"/>
-            <a:r>
-              <a:rPr/>
-              <a:t>Differences lie in architecture, training efficiency, and interpretability.</a:t>
+            <a:pPr lvl="1"/>
+            <a:r>
+              <a:rPr/>
+              <a:t>Papers describe experimental conditions, but formats vary widely.</a:t>
+            </a:r>
+          </a:p>
+          <a:p>
+            <a:pPr lvl="1"/>
+            <a:r>
+              <a:rPr/>
+              <a:t>Not machine-readable or standardized for AI training.</a:t>
             </a:r>
           </a:p>
           <a:p>
@@ -3852,44 +3724,14 @@
             </a:pPr>
             <a:r>
               <a:rPr b="1"/>
-              <a:t>Training: The Core Process</a:t>
-            </a:r>
-          </a:p>
-          <a:p>
-            <a:pPr lvl="0"/>
-            <a:r>
-              <a:rPr b="1"/>
-              <a:t>Objective</a:t>
-            </a:r>
-            <a:r>
-              <a:rPr/>
-              <a:t>: Minimize the </a:t>
-            </a:r>
-            <a:r>
-              <a:rPr b="1"/>
-              <a:t>loss function</a:t>
-            </a:r>
-            <a:r>
-              <a:rPr/>
-              <a:t> (e.g., Mean Squared Error, Cross-Entropy).</a:t>
-            </a:r>
-          </a:p>
-          <a:p>
-            <a:pPr lvl="0"/>
-            <a:r>
-              <a:rPr b="1"/>
-              <a:t>Loss Function</a:t>
-            </a:r>
-            <a:r>
-              <a:rPr/>
-              <a:t>: Measures the difference between predicted and actual outputs.</a:t>
-            </a:r>
-          </a:p>
-          <a:p>
-            <a:pPr lvl="0"/>
-            <a:r>
-              <a:rPr b="1"/>
-              <a:t>Steps</a:t>
+              <a:t>The Power of Simulated Data</a:t>
+            </a:r>
+          </a:p>
+          <a:p>
+            <a:pPr lvl="0"/>
+            <a:r>
+              <a:rPr b="1"/>
+              <a:t>Controlled Parameters</a:t>
             </a:r>
             <a:r>
               <a:rPr/>
@@ -3897,99 +3739,150 @@
             </a:r>
           </a:p>
           <a:p>
-            <a:pPr lvl="0" indent="-342900" marL="342900">
-              <a:buAutoNum type="arabicPeriod"/>
+            <a:pPr lvl="1"/>
+            <a:r>
+              <a:rPr/>
+              <a:t>Every input (e.g., sample thickness, detector angle) is known and adjustable.</a:t>
+            </a:r>
+          </a:p>
+          <a:p>
+            <a:pPr lvl="1"/>
+            <a:r>
+              <a:rPr/>
+              <a:t>Outputs (e.g., scattering patterns, spectra) are directly linked to inputs.</a:t>
+            </a:r>
+          </a:p>
+          <a:p>
+            <a:pPr lvl="0"/>
+            <a:r>
+              <a:rPr b="1"/>
+              <a:t>Pipeline Workflow</a:t>
+            </a:r>
+            <a:r>
+              <a:rPr/>
+              <a:t>:</a:t>
+            </a:r>
+          </a:p>
+          <a:p>
+            <a:pPr lvl="1"/>
+            <a:r>
+              <a:rPr/>
+              <a:t>Parameters → [Simulation (McStas/McXtrace)] → Virtual “Measurement”</a:t>
+            </a:r>
+          </a:p>
+          <a:p>
+            <a:pPr lvl="1" indent="0" marL="342900">
+              <a:buNone/>
             </a:pPr>
             <a:r>
-              <a:rPr b="1"/>
-              <a:t>Forward Pass</a:t>
-            </a:r>
-            <a:r>
-              <a:rPr/>
-              <a:t>: Compute predictions for a batch of training data.</a:t>
-            </a:r>
-          </a:p>
-          <a:p>
-            <a:pPr lvl="0" indent="-342900" marL="342900">
-              <a:buAutoNum type="arabicPeriod"/>
+              <a:rPr/>
+              <a:t>Example: Simulate a neutron scattering experiment with varying sample temperatures.</a:t>
+            </a:r>
+          </a:p>
+          <a:p>
+            <a:pPr lvl="0"/>
+            <a:r>
+              <a:rPr b="1"/>
+              <a:t>Inverse Problem</a:t>
+            </a:r>
+            <a:r>
+              <a:rPr/>
+              <a:t>:</a:t>
+            </a:r>
+          </a:p>
+          <a:p>
+            <a:pPr lvl="0"/>
+            <a:r>
+              <a:rPr b="1"/>
+              <a:t>Goal</a:t>
+            </a:r>
+            <a:r>
+              <a:rPr/>
+              <a:t>: Reconstruct input parameters from measured data.</a:t>
+            </a:r>
+          </a:p>
+          <a:p>
+            <a:pPr lvl="0"/>
+            <a:r>
+              <a:rPr b="1"/>
+              <a:t>AI Approach</a:t>
+            </a:r>
+            <a:r>
+              <a:rPr/>
+              <a:t>:</a:t>
+            </a:r>
+          </a:p>
+          <a:p>
+            <a:pPr lvl="1" indent="0">
+              <a:buNone/>
             </a:pPr>
             <a:r>
-              <a:rPr b="1"/>
-              <a:t>Loss Calculation</a:t>
-            </a:r>
-            <a:r>
-              <a:rPr/>
-              <a:t>: Evaluate how far predictions are from true values.</a:t>
-            </a:r>
-          </a:p>
-          <a:p>
-            <a:pPr lvl="0" indent="-342900" marL="342900">
-              <a:buAutoNum type="arabicPeriod"/>
+              <a:rPr>
+                <a:latin typeface="Courier"/>
+              </a:rPr>
+              <a:t>Measurement → [AI Algorithm (e.g., CNN, Bayesian Optimization)] → Parameters</a:t>
+            </a:r>
+          </a:p>
+          <a:p>
+            <a:pPr lvl="0"/>
+            <a:r>
+              <a:rPr/>
+              <a:t>Example: Predict sample composition from a scattering pattern.</a:t>
+            </a:r>
+          </a:p>
+          <a:p>
+            <a:pPr lvl="0"/>
+            <a:r>
+              <a:rPr b="1"/>
+              <a:t>Surrogate Models</a:t>
+            </a:r>
+            <a:r>
+              <a:rPr/>
+              <a:t>:</a:t>
+            </a:r>
+          </a:p>
+          <a:p>
+            <a:pPr lvl="0"/>
+            <a:r>
+              <a:rPr b="1"/>
+              <a:t>Purpose</a:t>
+            </a:r>
+            <a:r>
+              <a:rPr/>
+              <a:t>: Replace slow simulations with fast AI models.</a:t>
+            </a:r>
+          </a:p>
+          <a:p>
+            <a:pPr lvl="0"/>
+            <a:r>
+              <a:rPr b="1"/>
+              <a:t>Pipeline</a:t>
+            </a:r>
+            <a:r>
+              <a:rPr/>
+              <a:t>:</a:t>
+            </a:r>
+          </a:p>
+          <a:p>
+            <a:pPr lvl="1" indent="0">
+              <a:buNone/>
             </a:pPr>
             <a:r>
-              <a:rPr b="1"/>
-              <a:t>Backpropagation</a:t>
-            </a:r>
-            <a:r>
-              <a:rPr/>
-              <a:t>: Compute gradients of the loss with respect to weights.</a:t>
-            </a:r>
-          </a:p>
-          <a:p>
-            <a:pPr lvl="0" indent="-342900" marL="342900">
-              <a:buAutoNum type="arabicPeriod"/>
-            </a:pPr>
-            <a:r>
-              <a:rPr b="1"/>
-              <a:t>Optimization</a:t>
-            </a:r>
-            <a:r>
-              <a:rPr/>
-              <a:t>: Update weights using an optimizer (e.g., Adam, SGD).</a:t>
-            </a:r>
-          </a:p>
-          <a:p>
-            <a:pPr lvl="0"/>
-            <a:r>
-              <a:rPr b="1"/>
-              <a:t>Key Factors for Success</a:t>
-            </a:r>
-            <a:r>
-              <a:rPr/>
-              <a:t>:</a:t>
-            </a:r>
-          </a:p>
-          <a:p>
-            <a:pPr lvl="0"/>
-            <a:r>
-              <a:rPr b="1"/>
-              <a:t>Data Quality</a:t>
-            </a:r>
-            <a:r>
-              <a:rPr/>
-              <a:t>: High-fidelity simulations with diverse parameters.</a:t>
-            </a:r>
-          </a:p>
-          <a:p>
-            <a:pPr lvl="0"/>
-            <a:r>
-              <a:rPr b="1"/>
-              <a:t>Model Architecture</a:t>
-            </a:r>
-            <a:r>
-              <a:rPr/>
-              <a:t>: Match complexity to the problem (e.g., CNNs for images, Transformers for sequences).</a:t>
-            </a:r>
-          </a:p>
-          <a:p>
-            <a:pPr lvl="0"/>
-            <a:r>
-              <a:rPr b="1"/>
-              <a:t>Hyperparameters</a:t>
-            </a:r>
-            <a:r>
-              <a:rPr/>
-              <a:t>: Learning rate, batch size, number of epochs.</a:t>
+              <a:rPr>
+                <a:latin typeface="Courier"/>
+              </a:rPr>
+              <a:t>Parameters → [AI Model (e.g., Neural Network)] → Virtual "Measurement" (1000x faster)</a:t>
+            </a:r>
+          </a:p>
+          <a:p>
+            <a:pPr lvl="0"/>
+            <a:r>
+              <a:rPr b="1"/>
+              <a:t>Use Case</a:t>
+            </a:r>
+            <a:r>
+              <a:rPr/>
+              <a:t>: Real-time optimization of beamline configurations.</a:t>
             </a:r>
           </a:p>
         </p:txBody>
@@ -4036,7 +3929,7 @@
             </a:pPr>
             <a:r>
               <a:rPr/>
-              <a:t>What You Will Learn and Practice</a:t>
+              <a:t>General AI Methodology</a:t>
             </a:r>
           </a:p>
         </p:txBody>
@@ -4064,7 +3957,122 @@
             </a:pPr>
             <a:r>
               <a:rPr b="1"/>
-              <a:t>Hands-On Skills</a:t>
+              <a:t>AI as a Universal Function Approximator</a:t>
+            </a:r>
+          </a:p>
+          <a:p>
+            <a:pPr lvl="0"/>
+            <a:r>
+              <a:rPr b="1"/>
+              <a:t>Black Box Concept</a:t>
+            </a:r>
+            <a:r>
+              <a:rPr/>
+              <a:t>:</a:t>
+            </a:r>
+          </a:p>
+          <a:p>
+            <a:pPr lvl="0"/>
+            <a:r>
+              <a:rPr/>
+              <a:t>Input (e.g., scattering pattern) → [AI Model] → Output (e.g., sample density).</a:t>
+            </a:r>
+          </a:p>
+          <a:p>
+            <a:pPr lvl="0"/>
+            <a:r>
+              <a:rPr b="1"/>
+              <a:t>Universal Approximation Theorem</a:t>
+            </a:r>
+            <a:r>
+              <a:rPr/>
+              <a:t>: A neural network can approximate any continuous function given sufficient data and complexity.</a:t>
+            </a:r>
+          </a:p>
+          <a:p>
+            <a:pPr lvl="0"/>
+            <a:r>
+              <a:rPr b="1"/>
+              <a:t>General Behavior</a:t>
+            </a:r>
+            <a:r>
+              <a:rPr/>
+              <a:t>:</a:t>
+            </a:r>
+          </a:p>
+          <a:p>
+            <a:pPr lvl="0"/>
+            <a:r>
+              <a:rPr/>
+              <a:t>All AI methods (CNNs, RNNs, SVMs) follow the same principle: </a:t>
+            </a:r>
+            <a:r>
+              <a:rPr b="1"/>
+              <a:t>map inputs to outputs via learned weights</a:t>
+            </a:r>
+            <a:r>
+              <a:rPr/>
+              <a:t>.</a:t>
+            </a:r>
+          </a:p>
+          <a:p>
+            <a:pPr lvl="0"/>
+            <a:r>
+              <a:rPr/>
+              <a:t>Differences lie in architecture, training efficiency, and interpretability.</a:t>
+            </a:r>
+          </a:p>
+          <a:p>
+            <a:pPr lvl="0" indent="0" marL="0">
+              <a:spcBef>
+                <a:spcPts val="3000"/>
+              </a:spcBef>
+              <a:buNone/>
+            </a:pPr>
+            <a:r>
+              <a:rPr b="1"/>
+              <a:t>Training: The Core Process</a:t>
+            </a:r>
+          </a:p>
+          <a:p>
+            <a:pPr lvl="0"/>
+            <a:r>
+              <a:rPr b="1"/>
+              <a:t>Objective</a:t>
+            </a:r>
+            <a:r>
+              <a:rPr/>
+              <a:t>: Minimize the </a:t>
+            </a:r>
+            <a:r>
+              <a:rPr b="1"/>
+              <a:t>loss function</a:t>
+            </a:r>
+            <a:r>
+              <a:rPr/>
+              <a:t> (e.g., Mean Squared Error, Cross-Entropy).</a:t>
+            </a:r>
+          </a:p>
+          <a:p>
+            <a:pPr lvl="0"/>
+            <a:r>
+              <a:rPr b="1"/>
+              <a:t>Loss Function</a:t>
+            </a:r>
+            <a:r>
+              <a:rPr/>
+              <a:t>: Measures the difference between predicted and actual outputs.</a:t>
+            </a:r>
+          </a:p>
+          <a:p>
+            <a:pPr lvl="0"/>
+            <a:r>
+              <a:rPr b="1"/>
+              <a:t>Steps</a:t>
+            </a:r>
+            <a:r>
+              <a:rPr/>
+              <a:t>:</a:t>
             </a:r>
           </a:p>
           <a:p>
@@ -4073,7 +4081,57 @@
             </a:pPr>
             <a:r>
               <a:rPr b="1"/>
-              <a:t>Setting Up Simulations</a:t>
+              <a:t>Forward Pass</a:t>
+            </a:r>
+            <a:r>
+              <a:rPr/>
+              <a:t>: Compute predictions for a batch of training data.</a:t>
+            </a:r>
+          </a:p>
+          <a:p>
+            <a:pPr lvl="0" indent="-342900" marL="342900">
+              <a:buAutoNum type="arabicPeriod"/>
+            </a:pPr>
+            <a:r>
+              <a:rPr b="1"/>
+              <a:t>Loss Calculation</a:t>
+            </a:r>
+            <a:r>
+              <a:rPr/>
+              <a:t>: Evaluate how far predictions are from true values.</a:t>
+            </a:r>
+          </a:p>
+          <a:p>
+            <a:pPr lvl="0" indent="-342900" marL="342900">
+              <a:buAutoNum type="arabicPeriod"/>
+            </a:pPr>
+            <a:r>
+              <a:rPr b="1"/>
+              <a:t>Backpropagation</a:t>
+            </a:r>
+            <a:r>
+              <a:rPr/>
+              <a:t>: Compute gradients of the loss with respect to weights.</a:t>
+            </a:r>
+          </a:p>
+          <a:p>
+            <a:pPr lvl="0" indent="-342900" marL="342900">
+              <a:buAutoNum type="arabicPeriod"/>
+            </a:pPr>
+            <a:r>
+              <a:rPr b="1"/>
+              <a:t>Optimization</a:t>
+            </a:r>
+            <a:r>
+              <a:rPr/>
+              <a:t>: Update weights using an optimizer (e.g., Adam, SGD).</a:t>
+            </a:r>
+          </a:p>
+          <a:p>
+            <a:pPr lvl="0"/>
+            <a:r>
+              <a:rPr b="1"/>
+              <a:t>Key Factors for Success</a:t>
             </a:r>
             <a:r>
               <a:rPr/>
@@ -4083,210 +4141,34 @@
           <a:p>
             <a:pPr lvl="0"/>
             <a:r>
-              <a:rPr/>
-              <a:t>Configure beamlines/instruments in </a:t>
-            </a:r>
-            <a:r>
-              <a:rPr b="1"/>
-              <a:t>McStas</a:t>
-            </a:r>
-            <a:r>
-              <a:rPr/>
-              <a:t> (neutrons) and </a:t>
-            </a:r>
-            <a:r>
-              <a:rPr b="1"/>
-              <a:t>McXtrace</a:t>
-            </a:r>
-            <a:r>
-              <a:rPr/>
-              <a:t> (X-rays).</a:t>
-            </a:r>
-          </a:p>
-          <a:p>
-            <a:pPr lvl="0"/>
-            <a:r>
-              <a:rPr/>
-              <a:t>Define sample properties (e.g., crystal structure, composition).</a:t>
-            </a:r>
-          </a:p>
-          <a:p>
-            <a:pPr lvl="0" indent="-342900" marL="342900">
-              <a:buAutoNum startAt="2" type="arabicPeriod"/>
-            </a:pPr>
-            <a:r>
-              <a:rPr b="1"/>
-              <a:t>Characterizing Models</a:t>
-            </a:r>
-            <a:r>
-              <a:rPr/>
-              <a:t>:</a:t>
-            </a:r>
-          </a:p>
-          <a:p>
-            <a:pPr lvl="0"/>
-            <a:r>
-              <a:rPr/>
-              <a:t>Analyze geometry (e.g., detector positions, slit sizes).</a:t>
-            </a:r>
-          </a:p>
-          <a:p>
-            <a:pPr lvl="0"/>
-            <a:r>
-              <a:rPr/>
-              <a:t>Extract parameters (e.g., resolution, flux) and results (e.g., spectra, diffraction patterns).</a:t>
-            </a:r>
-          </a:p>
-          <a:p>
-            <a:pPr lvl="0" indent="-342900" marL="342900">
-              <a:buAutoNum startAt="3" type="arabicPeriod"/>
-            </a:pPr>
-            <a:r>
-              <a:rPr b="1"/>
-              <a:t>Generating Datasets</a:t>
-            </a:r>
-            <a:r>
-              <a:rPr/>
-              <a:t>:</a:t>
-            </a:r>
-          </a:p>
-          <a:p>
-            <a:pPr lvl="0"/>
-            <a:r>
-              <a:rPr/>
-              <a:t>Automate simulations across parameter ranges (e.g., vary temperature, pressure).</a:t>
-            </a:r>
-          </a:p>
-          <a:p>
-            <a:pPr lvl="0"/>
-            <a:r>
-              <a:rPr/>
-              <a:t>Output: Labeled datasets of </a:t>
-            </a:r>
-            <a:r>
-              <a:rPr>
-                <a:latin typeface="Courier"/>
-              </a:rPr>
-              <a:t>(input_parameters, virtual_measurements)</a:t>
-            </a:r>
-            <a:r>
-              <a:rPr/>
-              <a:t>.</a:t>
-            </a:r>
-          </a:p>
-          <a:p>
-            <a:pPr lvl="0" indent="-342900" marL="342900">
-              <a:buAutoNum startAt="4" type="arabicPeriod"/>
-            </a:pPr>
-            <a:r>
-              <a:rPr b="1"/>
-              <a:t>Surrogate Modeling</a:t>
-            </a:r>
-            <a:r>
-              <a:rPr/>
-              <a:t>:</a:t>
-            </a:r>
-          </a:p>
-          <a:p>
-            <a:pPr lvl="0"/>
-            <a:r>
-              <a:rPr/>
-              <a:t>Train AI models (e.g., neural networks) to mimic simulations.</a:t>
-            </a:r>
-          </a:p>
-          <a:p>
-            <a:pPr lvl="0"/>
-            <a:r>
-              <a:rPr b="1"/>
-              <a:t>Example</a:t>
-            </a:r>
-            <a:r>
-              <a:rPr/>
-              <a:t>: Replace a 1-hour simulation with a 1-second AI prediction.</a:t>
-            </a:r>
-          </a:p>
-          <a:p>
-            <a:pPr lvl="0" indent="-342900" marL="342900">
-              <a:buAutoNum startAt="5" type="arabicPeriod"/>
-            </a:pPr>
-            <a:r>
-              <a:rPr b="1"/>
-              <a:t>Solving Inverse Problems</a:t>
-            </a:r>
-            <a:r>
-              <a:rPr/>
-              <a:t>:</a:t>
-            </a:r>
-          </a:p>
-          <a:p>
-            <a:pPr lvl="0"/>
-            <a:r>
-              <a:rPr/>
-              <a:t>Use AI to predict parameters from virtual/real measurements.</a:t>
-            </a:r>
-          </a:p>
-          <a:p>
-            <a:pPr lvl="0"/>
-            <a:r>
-              <a:rPr b="1"/>
-              <a:t>Example</a:t>
-            </a:r>
-            <a:r>
-              <a:rPr/>
-              <a:t>: Given a scattering pattern, estimate sample thickness and composition.</a:t>
-            </a:r>
-          </a:p>
-          <a:p>
-            <a:pPr lvl="0" indent="-342900" marL="342900">
-              <a:buAutoNum startAt="6" type="arabicPeriod"/>
-            </a:pPr>
-            <a:r>
-              <a:rPr b="1"/>
-              <a:t>Experimenting with Algorithms</a:t>
-            </a:r>
-            <a:r>
-              <a:rPr/>
-              <a:t>:</a:t>
-            </a:r>
-          </a:p>
-          <a:p>
-            <a:pPr lvl="0"/>
-            <a:r>
-              <a:rPr/>
-              <a:t>Compare methods:</a:t>
-            </a:r>
-          </a:p>
-          <a:p>
-            <a:pPr lvl="1"/>
-            <a:r>
-              <a:rPr b="1"/>
-              <a:t>Neural Networks</a:t>
-            </a:r>
-            <a:r>
-              <a:rPr/>
-              <a:t>: High accuracy, requires large data.</a:t>
-            </a:r>
-          </a:p>
-          <a:p>
-            <a:pPr lvl="1"/>
-            <a:r>
-              <a:rPr b="1"/>
-              <a:t>Gaussian Processes</a:t>
-            </a:r>
-            <a:r>
-              <a:rPr/>
-              <a:t>: Uncertainty quantification, slower for large datasets.</a:t>
-            </a:r>
-          </a:p>
-          <a:p>
-            <a:pPr lvl="1"/>
-            <a:r>
-              <a:rPr b="1"/>
-              <a:t>Random Forests</a:t>
-            </a:r>
-            <a:r>
-              <a:rPr/>
-              <a:t>: Interpretable, robust to noise.</a:t>
+              <a:rPr b="1"/>
+              <a:t>Data Quality</a:t>
+            </a:r>
+            <a:r>
+              <a:rPr/>
+              <a:t>: High-fidelity simulations with diverse parameters.</a:t>
+            </a:r>
+          </a:p>
+          <a:p>
+            <a:pPr lvl="0"/>
+            <a:r>
+              <a:rPr b="1"/>
+              <a:t>Model Architecture</a:t>
+            </a:r>
+            <a:r>
+              <a:rPr/>
+              <a:t>: Match complexity to the problem (e.g., CNNs for images, Transformers for sequences).</a:t>
+            </a:r>
+          </a:p>
+          <a:p>
+            <a:pPr lvl="0"/>
+            <a:r>
+              <a:rPr b="1"/>
+              <a:t>Hyperparameters</a:t>
+            </a:r>
+            <a:r>
+              <a:rPr/>
+              <a:t>: Learning rate, batch size, number of epochs.</a:t>
             </a:r>
           </a:p>
         </p:txBody>
@@ -4333,7 +4215,7 @@
             </a:pPr>
             <a:r>
               <a:rPr/>
-              <a:t>What You Will Use (Resources)</a:t>
+              <a:t>What You Will Learn and Practice</a:t>
             </a:r>
           </a:p>
         </p:txBody>
@@ -4361,14 +4243,16 @@
             </a:pPr>
             <a:r>
               <a:rPr b="1"/>
-              <a:t>Tools and Infrastructure</a:t>
-            </a:r>
-          </a:p>
-          <a:p>
-            <a:pPr lvl="0"/>
-            <a:r>
-              <a:rPr b="1"/>
-              <a:t>Your Laptop</a:t>
+              <a:t>Hands-On Skills</a:t>
+            </a:r>
+          </a:p>
+          <a:p>
+            <a:pPr lvl="0" indent="-342900" marL="342900">
+              <a:buAutoNum type="arabicPeriod"/>
+            </a:pPr>
+            <a:r>
+              <a:rPr b="1"/>
+              <a:t>Setting Up Simulations</a:t>
             </a:r>
             <a:r>
               <a:rPr/>
@@ -4379,21 +4263,39 @@
             <a:pPr lvl="0"/>
             <a:r>
               <a:rPr/>
-              <a:t>Local development and testing.</a:t>
-            </a:r>
-          </a:p>
-          <a:p>
-            <a:pPr lvl="0"/>
-            <a:r>
-              <a:rPr/>
-              <a:t>Run lightweight simulations (e.g., small McStas/McXtrace models).</a:t>
-            </a:r>
-          </a:p>
-          <a:p>
-            <a:pPr lvl="0"/>
-            <a:r>
-              <a:rPr b="1"/>
-              <a:t>Local Mini-Server</a:t>
+              <a:t>Configure beamlines/instruments in </a:t>
+            </a:r>
+            <a:r>
+              <a:rPr b="1"/>
+              <a:t>McStas</a:t>
+            </a:r>
+            <a:r>
+              <a:rPr/>
+              <a:t> (neutrons) and </a:t>
+            </a:r>
+            <a:r>
+              <a:rPr b="1"/>
+              <a:t>McXtrace</a:t>
+            </a:r>
+            <a:r>
+              <a:rPr/>
+              <a:t> (X-rays).</a:t>
+            </a:r>
+          </a:p>
+          <a:p>
+            <a:pPr lvl="0"/>
+            <a:r>
+              <a:rPr/>
+              <a:t>Define sample properties (e.g., crystal structure, composition).</a:t>
+            </a:r>
+          </a:p>
+          <a:p>
+            <a:pPr lvl="0" indent="-342900" marL="342900">
+              <a:buAutoNum startAt="2" type="arabicPeriod"/>
+            </a:pPr>
+            <a:r>
+              <a:rPr b="1"/>
+              <a:t>Characterizing Models</a:t>
             </a:r>
             <a:r>
               <a:rPr/>
@@ -4404,21 +4306,23 @@
             <a:pPr lvl="0"/>
             <a:r>
               <a:rPr/>
-              <a:t>Host datasets and share results with collaborators.</a:t>
-            </a:r>
-          </a:p>
-          <a:p>
-            <a:pPr lvl="0"/>
-            <a:r>
-              <a:rPr/>
-              <a:t>Example: JupyterHub for interactive analysis.</a:t>
-            </a:r>
-          </a:p>
-          <a:p>
-            <a:pPr lvl="0"/>
-            <a:r>
-              <a:rPr b="1"/>
-              <a:t>Remote Computing Service</a:t>
+              <a:t>Analyze geometry (e.g., detector positions, slit sizes).</a:t>
+            </a:r>
+          </a:p>
+          <a:p>
+            <a:pPr lvl="0"/>
+            <a:r>
+              <a:rPr/>
+              <a:t>Extract parameters (e.g., resolution, flux) and results (e.g., spectra, diffraction patterns).</a:t>
+            </a:r>
+          </a:p>
+          <a:p>
+            <a:pPr lvl="0" indent="-342900" marL="342900">
+              <a:buAutoNum startAt="3" type="arabicPeriod"/>
+            </a:pPr>
+            <a:r>
+              <a:rPr b="1"/>
+              <a:t>Generating Datasets</a:t>
             </a:r>
             <a:r>
               <a:rPr/>
@@ -4428,30 +4332,34 @@
           <a:p>
             <a:pPr lvl="0"/>
             <a:r>
-              <a:rPr b="1"/>
-              <a:t>High-Performance Computing (HPC)</a:t>
-            </a:r>
-            <a:r>
-              <a:rPr/>
-              <a:t>: Run large-scale simulations (e.g., clusters, cloud).</a:t>
-            </a:r>
-          </a:p>
-          <a:p>
-            <a:pPr lvl="0"/>
-            <a:r>
-              <a:rPr b="1"/>
-              <a:t>GPU Nodes</a:t>
-            </a:r>
-            <a:r>
-              <a:rPr/>
-              <a:t>: Train deep learning models efficiently.</a:t>
-            </a:r>
-          </a:p>
-          <a:p>
-            <a:pPr lvl="0"/>
-            <a:r>
-              <a:rPr b="1"/>
-              <a:t>Your Brain</a:t>
+              <a:rPr/>
+              <a:t>Automate simulations across parameter ranges (e.g., vary temperature, pressure).</a:t>
+            </a:r>
+          </a:p>
+          <a:p>
+            <a:pPr lvl="0"/>
+            <a:r>
+              <a:rPr/>
+              <a:t>Output: Labeled datasets of </a:t>
+            </a:r>
+            <a:r>
+              <a:rPr>
+                <a:latin typeface="Courier"/>
+              </a:rPr>
+              <a:t>(input_parameters, virtual_measurements)</a:t>
+            </a:r>
+            <a:r>
+              <a:rPr/>
+              <a:t>.</a:t>
+            </a:r>
+          </a:p>
+          <a:p>
+            <a:pPr lvl="0" indent="-342900" marL="342900">
+              <a:buAutoNum startAt="4" type="arabicPeriod"/>
+            </a:pPr>
+            <a:r>
+              <a:rPr b="1"/>
+              <a:t>Surrogate Modeling</a:t>
             </a:r>
             <a:r>
               <a:rPr/>
@@ -4462,14 +4370,102 @@
             <a:pPr lvl="0"/>
             <a:r>
               <a:rPr/>
-              <a:t>Design experiments, debug models, and interpret results.</a:t>
-            </a:r>
-          </a:p>
-          <a:p>
-            <a:pPr lvl="0"/>
-            <a:r>
-              <a:rPr/>
-              <a:t>Collaborate with peers to tackle complex problems.</a:t>
+              <a:t>Train AI models (e.g., neural networks) to mimic simulations.</a:t>
+            </a:r>
+          </a:p>
+          <a:p>
+            <a:pPr lvl="0"/>
+            <a:r>
+              <a:rPr b="1"/>
+              <a:t>Example</a:t>
+            </a:r>
+            <a:r>
+              <a:rPr/>
+              <a:t>: Replace a 1-hour simulation with a 1-second AI prediction.</a:t>
+            </a:r>
+          </a:p>
+          <a:p>
+            <a:pPr lvl="0" indent="-342900" marL="342900">
+              <a:buAutoNum startAt="5" type="arabicPeriod"/>
+            </a:pPr>
+            <a:r>
+              <a:rPr b="1"/>
+              <a:t>Solving Inverse Problems</a:t>
+            </a:r>
+            <a:r>
+              <a:rPr/>
+              <a:t>:</a:t>
+            </a:r>
+          </a:p>
+          <a:p>
+            <a:pPr lvl="0"/>
+            <a:r>
+              <a:rPr/>
+              <a:t>Use AI to predict parameters from virtual/real measurements.</a:t>
+            </a:r>
+          </a:p>
+          <a:p>
+            <a:pPr lvl="0"/>
+            <a:r>
+              <a:rPr b="1"/>
+              <a:t>Example</a:t>
+            </a:r>
+            <a:r>
+              <a:rPr/>
+              <a:t>: Given a scattering pattern, estimate sample thickness and composition.</a:t>
+            </a:r>
+          </a:p>
+          <a:p>
+            <a:pPr lvl="0" indent="-342900" marL="342900">
+              <a:buAutoNum startAt="6" type="arabicPeriod"/>
+            </a:pPr>
+            <a:r>
+              <a:rPr b="1"/>
+              <a:t>Experimenting with Algorithms</a:t>
+            </a:r>
+            <a:r>
+              <a:rPr/>
+              <a:t>:</a:t>
+            </a:r>
+          </a:p>
+          <a:p>
+            <a:pPr lvl="0"/>
+            <a:r>
+              <a:rPr/>
+              <a:t>Compare methods:</a:t>
+            </a:r>
+          </a:p>
+          <a:p>
+            <a:pPr lvl="1"/>
+            <a:r>
+              <a:rPr b="1"/>
+              <a:t>Neural Networks</a:t>
+            </a:r>
+            <a:r>
+              <a:rPr/>
+              <a:t>: High accuracy, requires large data.</a:t>
+            </a:r>
+          </a:p>
+          <a:p>
+            <a:pPr lvl="1"/>
+            <a:r>
+              <a:rPr b="1"/>
+              <a:t>Gaussian Processes</a:t>
+            </a:r>
+            <a:r>
+              <a:rPr/>
+              <a:t>: Uncertainty quantification, slower for large datasets.</a:t>
+            </a:r>
+          </a:p>
+          <a:p>
+            <a:pPr lvl="1"/>
+            <a:r>
+              <a:rPr b="1"/>
+              <a:t>Random Forests</a:t>
+            </a:r>
+            <a:r>
+              <a:rPr/>
+              <a:t>: Interpretable, robust to noise.</a:t>
             </a:r>
           </a:p>
         </p:txBody>
@@ -4516,7 +4512,7 @@
             </a:pPr>
             <a:r>
               <a:rPr/>
-              <a:t>Summary and Next Steps</a:t>
+              <a:t>What You Will Use (Resources)</a:t>
             </a:r>
           </a:p>
         </p:txBody>
@@ -4544,14 +4540,14 @@
             </a:pPr>
             <a:r>
               <a:rPr b="1"/>
-              <a:t>Key Takeaways</a:t>
-            </a:r>
-          </a:p>
-          <a:p>
-            <a:pPr lvl="0"/>
-            <a:r>
-              <a:rPr b="1"/>
-              <a:t>AI + Simulations = Powerful Combination</a:t>
+              <a:t>Tools and Infrastructure</a:t>
+            </a:r>
+          </a:p>
+          <a:p>
+            <a:pPr lvl="0"/>
+            <a:r>
+              <a:rPr b="1"/>
+              <a:t>Your Laptop</a:t>
             </a:r>
             <a:r>
               <a:rPr/>
@@ -4562,45 +4558,21 @@
             <a:pPr lvl="0"/>
             <a:r>
               <a:rPr/>
-              <a:t>Simulations provide </a:t>
-            </a:r>
-            <a:r>
-              <a:rPr b="1"/>
-              <a:t>realistic, labeled data</a:t>
-            </a:r>
-            <a:r>
-              <a:rPr/>
-              <a:t> for training AI.</a:t>
-            </a:r>
-          </a:p>
-          <a:p>
-            <a:pPr lvl="0"/>
-            <a:r>
-              <a:rPr/>
-              <a:t>AI enables </a:t>
-            </a:r>
-            <a:r>
-              <a:rPr b="1"/>
-              <a:t>fast predictions</a:t>
-            </a:r>
-            <a:r>
-              <a:rPr/>
-              <a:t> and </a:t>
-            </a:r>
-            <a:r>
-              <a:rPr b="1"/>
-              <a:t>inverse problem-solving</a:t>
-            </a:r>
-            <a:r>
-              <a:rPr/>
-              <a:t>.</a:t>
-            </a:r>
-          </a:p>
-          <a:p>
-            <a:pPr lvl="0"/>
-            <a:r>
-              <a:rPr b="1"/>
-              <a:t>Applications</a:t>
+              <a:t>Local development and testing.</a:t>
+            </a:r>
+          </a:p>
+          <a:p>
+            <a:pPr lvl="0"/>
+            <a:r>
+              <a:rPr/>
+              <a:t>Run lightweight simulations (e.g., small McStas/McXtrace models).</a:t>
+            </a:r>
+          </a:p>
+          <a:p>
+            <a:pPr lvl="0"/>
+            <a:r>
+              <a:rPr b="1"/>
+              <a:t>Local Mini-Server</a:t>
             </a:r>
             <a:r>
               <a:rPr/>
@@ -4611,98 +4583,72 @@
             <a:pPr lvl="0"/>
             <a:r>
               <a:rPr/>
-              <a:t>Optimize beamline designs.</a:t>
-            </a:r>
-          </a:p>
-          <a:p>
-            <a:pPr lvl="0"/>
-            <a:r>
-              <a:rPr/>
-              <a:t>Accelerate material discovery (e.g., predict properties from scattering data).</a:t>
-            </a:r>
-          </a:p>
-          <a:p>
-            <a:pPr lvl="0"/>
-            <a:r>
-              <a:rPr/>
-              <a:t>Reduce reliance on expensive experimental time.</a:t>
-            </a:r>
-          </a:p>
-          <a:p>
-            <a:pPr lvl="0" indent="0" marL="0">
-              <a:spcBef>
-                <a:spcPts val="3000"/>
-              </a:spcBef>
-              <a:buNone/>
-            </a:pPr>
-            <a:r>
-              <a:rPr b="1"/>
-              <a:t>Next Steps for You</a:t>
-            </a:r>
-          </a:p>
-          <a:p>
-            <a:pPr lvl="0" indent="-342900" marL="342900">
-              <a:buAutoNum type="arabicPeriod"/>
-            </a:pPr>
-            <a:r>
-              <a:rPr b="1"/>
-              <a:t>Start Small</a:t>
-            </a:r>
-            <a:r>
-              <a:rPr/>
-              <a:t>: Simulate a simple experiment (e.g., neutron diffraction from a known crystal).</a:t>
-            </a:r>
-          </a:p>
-          <a:p>
-            <a:pPr lvl="0" indent="-342900" marL="342900">
-              <a:buAutoNum type="arabicPeriod"/>
-            </a:pPr>
-            <a:r>
-              <a:rPr b="1"/>
-              <a:t>Generate Data</a:t>
-            </a:r>
-            <a:r>
-              <a:rPr/>
-              <a:t>: Create a dataset with 100–1000 parameter combinations.</a:t>
-            </a:r>
-          </a:p>
-          <a:p>
-            <a:pPr lvl="0" indent="-342900" marL="342900">
-              <a:buAutoNum type="arabicPeriod"/>
-            </a:pPr>
-            <a:r>
-              <a:rPr b="1"/>
-              <a:t>Train a Model</a:t>
-            </a:r>
-            <a:r>
-              <a:rPr/>
-              <a:t>: Use a neural network to predict parameters from simulated outputs.</a:t>
-            </a:r>
-          </a:p>
-          <a:p>
-            <a:pPr lvl="0" indent="-342900" marL="342900">
-              <a:buAutoNum type="arabicPeriod"/>
-            </a:pPr>
-            <a:r>
-              <a:rPr b="1"/>
-              <a:t>Validate</a:t>
-            </a:r>
-            <a:r>
-              <a:rPr/>
-              <a:t>: Test the model on real experimental data (if available).</a:t>
-            </a:r>
-          </a:p>
-          <a:p>
-            <a:pPr lvl="0" indent="-342900" marL="342900">
-              <a:buAutoNum type="arabicPeriod"/>
-            </a:pPr>
-            <a:r>
-              <a:rPr b="1"/>
-              <a:t>Iterate</a:t>
-            </a:r>
-            <a:r>
-              <a:rPr/>
-              <a:t>: Refine the model and expand to more complex problems.</a:t>
+              <a:t>Host datasets and share results with collaborators.</a:t>
+            </a:r>
+          </a:p>
+          <a:p>
+            <a:pPr lvl="0"/>
+            <a:r>
+              <a:rPr/>
+              <a:t>Example: JupyterHub for interactive analysis.</a:t>
+            </a:r>
+          </a:p>
+          <a:p>
+            <a:pPr lvl="0"/>
+            <a:r>
+              <a:rPr b="1"/>
+              <a:t>Remote Computing Service</a:t>
+            </a:r>
+            <a:r>
+              <a:rPr/>
+              <a:t>:</a:t>
+            </a:r>
+          </a:p>
+          <a:p>
+            <a:pPr lvl="0"/>
+            <a:r>
+              <a:rPr b="1"/>
+              <a:t>High-Performance Computing (HPC)</a:t>
+            </a:r>
+            <a:r>
+              <a:rPr/>
+              <a:t>: Run large-scale simulations (e.g., clusters, cloud).</a:t>
+            </a:r>
+          </a:p>
+          <a:p>
+            <a:pPr lvl="0"/>
+            <a:r>
+              <a:rPr b="1"/>
+              <a:t>GPU Nodes</a:t>
+            </a:r>
+            <a:r>
+              <a:rPr/>
+              <a:t>: Train deep learning models efficiently.</a:t>
+            </a:r>
+          </a:p>
+          <a:p>
+            <a:pPr lvl="0"/>
+            <a:r>
+              <a:rPr b="1"/>
+              <a:t>Your Brain</a:t>
+            </a:r>
+            <a:r>
+              <a:rPr/>
+              <a:t>:</a:t>
+            </a:r>
+          </a:p>
+          <a:p>
+            <a:pPr lvl="0"/>
+            <a:r>
+              <a:rPr/>
+              <a:t>Design experiments, debug models, and interpret results.</a:t>
+            </a:r>
+          </a:p>
+          <a:p>
+            <a:pPr lvl="0"/>
+            <a:r>
+              <a:rPr/>
+              <a:t>Collaborate with peers to tackle complex problems.</a:t>
             </a:r>
           </a:p>
         </p:txBody>
@@ -4749,7 +4695,7 @@
             </a:pPr>
             <a:r>
               <a:rPr/>
-              <a:t>Thank You!</a:t>
+              <a:t>Summary and Next Steps</a:t>
             </a:r>
           </a:p>
         </p:txBody>
@@ -4770,33 +4716,172 @@
           <a:lstStyle/>
           <a:p>
             <a:pPr lvl="0" indent="0" marL="0">
+              <a:spcBef>
+                <a:spcPts val="3000"/>
+              </a:spcBef>
               <a:buNone/>
             </a:pPr>
             <a:r>
-              <a:rPr i="1"/>
-              <a:t>Questions?</a:t>
+              <a:rPr b="1"/>
+              <a:t>Key Takeaways</a:t>
+            </a:r>
+          </a:p>
+          <a:p>
+            <a:pPr lvl="0"/>
+            <a:r>
+              <a:rPr b="1"/>
+              <a:t>AI + Simulations = Powerful Combination</a:t>
+            </a:r>
+            <a:r>
+              <a:rPr/>
+              <a:t>:</a:t>
+            </a:r>
+          </a:p>
+          <a:p>
+            <a:pPr lvl="0"/>
+            <a:r>
+              <a:rPr/>
+              <a:t>Simulations provide </a:t>
+            </a:r>
+            <a:r>
+              <a:rPr b="1"/>
+              <a:t>realistic, labeled data</a:t>
+            </a:r>
+            <a:r>
+              <a:rPr/>
+              <a:t> for training AI.</a:t>
+            </a:r>
+          </a:p>
+          <a:p>
+            <a:pPr lvl="0"/>
+            <a:r>
+              <a:rPr/>
+              <a:t>AI enables </a:t>
+            </a:r>
+            <a:r>
+              <a:rPr b="1"/>
+              <a:t>fast predictions</a:t>
+            </a:r>
+            <a:r>
+              <a:rPr/>
+              <a:t> and </a:t>
+            </a:r>
+            <a:r>
+              <a:rPr b="1"/>
+              <a:t>inverse problem-solving</a:t>
+            </a:r>
+            <a:r>
+              <a:rPr/>
+              <a:t>.</a:t>
+            </a:r>
+          </a:p>
+          <a:p>
+            <a:pPr lvl="0"/>
+            <a:r>
+              <a:rPr b="1"/>
+              <a:t>Applications</a:t>
+            </a:r>
+            <a:r>
+              <a:rPr/>
+              <a:t>:</a:t>
+            </a:r>
+          </a:p>
+          <a:p>
+            <a:pPr lvl="0"/>
+            <a:r>
+              <a:rPr/>
+              <a:t>Optimize beamline designs.</a:t>
+            </a:r>
+          </a:p>
+          <a:p>
+            <a:pPr lvl="0"/>
+            <a:r>
+              <a:rPr/>
+              <a:t>Accelerate material discovery (e.g., predict properties from scattering data).</a:t>
+            </a:r>
+          </a:p>
+          <a:p>
+            <a:pPr lvl="0"/>
+            <a:r>
+              <a:rPr/>
+              <a:t>Reduce reliance on expensive experimental time.</a:t>
             </a:r>
           </a:p>
           <a:p>
             <a:pPr lvl="0" indent="0" marL="0">
+              <a:spcBef>
+                <a:spcPts val="3000"/>
+              </a:spcBef>
               <a:buNone/>
             </a:pPr>
             <a:r>
               <a:rPr b="1"/>
-              <a:t>Contact</a:t>
-            </a:r>
-            <a:r>
-              <a:rPr/>
-              <a:t>: Emmanuel Farhi · [Your Affiliation/Email]</a:t>
-            </a:r>
-          </a:p>
-          <a:p>
-            <a:pPr lvl="0" indent="0" marL="0">
-              <a:buNone/>
+              <a:t>Next Steps for You</a:t>
+            </a:r>
+          </a:p>
+          <a:p>
+            <a:pPr lvl="0" indent="-342900" marL="342900">
+              <a:buAutoNum type="arabicPeriod"/>
             </a:pPr>
             <a:r>
-              <a:rPr i="1"/>
-              <a:t>Supported by PEPR DIADEM and Partner Organizations</a:t>
+              <a:rPr b="1"/>
+              <a:t>Start Small</a:t>
+            </a:r>
+            <a:r>
+              <a:rPr/>
+              <a:t>: Simulate a simple experiment (e.g., neutron diffraction from a known crystal).</a:t>
+            </a:r>
+          </a:p>
+          <a:p>
+            <a:pPr lvl="0" indent="-342900" marL="342900">
+              <a:buAutoNum type="arabicPeriod"/>
+            </a:pPr>
+            <a:r>
+              <a:rPr b="1"/>
+              <a:t>Generate Data</a:t>
+            </a:r>
+            <a:r>
+              <a:rPr/>
+              <a:t>: Create a dataset with 100–1000 parameter combinations.</a:t>
+            </a:r>
+          </a:p>
+          <a:p>
+            <a:pPr lvl="0" indent="-342900" marL="342900">
+              <a:buAutoNum type="arabicPeriod"/>
+            </a:pPr>
+            <a:r>
+              <a:rPr b="1"/>
+              <a:t>Train a Model</a:t>
+            </a:r>
+            <a:r>
+              <a:rPr/>
+              <a:t>: Use a neural network to predict parameters from simulated outputs.</a:t>
+            </a:r>
+          </a:p>
+          <a:p>
+            <a:pPr lvl="0" indent="-342900" marL="342900">
+              <a:buAutoNum type="arabicPeriod"/>
+            </a:pPr>
+            <a:r>
+              <a:rPr b="1"/>
+              <a:t>Validate</a:t>
+            </a:r>
+            <a:r>
+              <a:rPr/>
+              <a:t>: Test the model on real experimental data (if available).</a:t>
+            </a:r>
+          </a:p>
+          <a:p>
+            <a:pPr lvl="0" indent="-342900" marL="342900">
+              <a:buAutoNum type="arabicPeriod"/>
+            </a:pPr>
+            <a:r>
+              <a:rPr b="1"/>
+              <a:t>Iterate</a:t>
+            </a:r>
+            <a:r>
+              <a:rPr/>
+              <a:t>: Refine the model and expand to more complex problems.</a:t>
             </a:r>
           </a:p>
         </p:txBody>
